--- a/2026/LEC/06-2 Обнаружение аномалий.pptx
+++ b/2026/LEC/06-2 Обнаружение аномалий.pptx
@@ -295,7 +295,7 @@
           <a:p>
             <a:fld id="{A76E1671-358D-4BAB-9EB2-DC8D65251B89}" type="datetimeFigureOut">
               <a:rPr lang="en-US" smtClean="0"/>
-              <a:t>8/20/2025</a:t>
+              <a:t>4/16/2026</a:t>
             </a:fld>
             <a:endParaRPr lang="en-US"/>
           </a:p>
@@ -495,7 +495,7 @@
           <a:p>
             <a:fld id="{A76E1671-358D-4BAB-9EB2-DC8D65251B89}" type="datetimeFigureOut">
               <a:rPr lang="en-US" smtClean="0"/>
-              <a:t>8/20/2025</a:t>
+              <a:t>4/16/2026</a:t>
             </a:fld>
             <a:endParaRPr lang="en-US"/>
           </a:p>
@@ -705,7 +705,7 @@
           <a:p>
             <a:fld id="{A76E1671-358D-4BAB-9EB2-DC8D65251B89}" type="datetimeFigureOut">
               <a:rPr lang="en-US" smtClean="0"/>
-              <a:t>8/20/2025</a:t>
+              <a:t>4/16/2026</a:t>
             </a:fld>
             <a:endParaRPr lang="en-US"/>
           </a:p>
@@ -905,7 +905,7 @@
           <a:p>
             <a:fld id="{A76E1671-358D-4BAB-9EB2-DC8D65251B89}" type="datetimeFigureOut">
               <a:rPr lang="en-US" smtClean="0"/>
-              <a:t>8/20/2025</a:t>
+              <a:t>4/16/2026</a:t>
             </a:fld>
             <a:endParaRPr lang="en-US"/>
           </a:p>
@@ -1181,7 +1181,7 @@
           <a:p>
             <a:fld id="{A76E1671-358D-4BAB-9EB2-DC8D65251B89}" type="datetimeFigureOut">
               <a:rPr lang="en-US" smtClean="0"/>
-              <a:t>8/20/2025</a:t>
+              <a:t>4/16/2026</a:t>
             </a:fld>
             <a:endParaRPr lang="en-US"/>
           </a:p>
@@ -1449,7 +1449,7 @@
           <a:p>
             <a:fld id="{A76E1671-358D-4BAB-9EB2-DC8D65251B89}" type="datetimeFigureOut">
               <a:rPr lang="en-US" smtClean="0"/>
-              <a:t>8/20/2025</a:t>
+              <a:t>4/16/2026</a:t>
             </a:fld>
             <a:endParaRPr lang="en-US"/>
           </a:p>
@@ -1864,7 +1864,7 @@
           <a:p>
             <a:fld id="{A76E1671-358D-4BAB-9EB2-DC8D65251B89}" type="datetimeFigureOut">
               <a:rPr lang="en-US" smtClean="0"/>
-              <a:t>8/20/2025</a:t>
+              <a:t>4/16/2026</a:t>
             </a:fld>
             <a:endParaRPr lang="en-US"/>
           </a:p>
@@ -2006,7 +2006,7 @@
           <a:p>
             <a:fld id="{A76E1671-358D-4BAB-9EB2-DC8D65251B89}" type="datetimeFigureOut">
               <a:rPr lang="en-US" smtClean="0"/>
-              <a:t>8/20/2025</a:t>
+              <a:t>4/16/2026</a:t>
             </a:fld>
             <a:endParaRPr lang="en-US"/>
           </a:p>
@@ -2119,7 +2119,7 @@
           <a:p>
             <a:fld id="{A76E1671-358D-4BAB-9EB2-DC8D65251B89}" type="datetimeFigureOut">
               <a:rPr lang="en-US" smtClean="0"/>
-              <a:t>8/20/2025</a:t>
+              <a:t>4/16/2026</a:t>
             </a:fld>
             <a:endParaRPr lang="en-US"/>
           </a:p>
@@ -2432,7 +2432,7 @@
           <a:p>
             <a:fld id="{A76E1671-358D-4BAB-9EB2-DC8D65251B89}" type="datetimeFigureOut">
               <a:rPr lang="en-US" smtClean="0"/>
-              <a:t>8/20/2025</a:t>
+              <a:t>4/16/2026</a:t>
             </a:fld>
             <a:endParaRPr lang="en-US"/>
           </a:p>
@@ -2721,7 +2721,7 @@
           <a:p>
             <a:fld id="{A76E1671-358D-4BAB-9EB2-DC8D65251B89}" type="datetimeFigureOut">
               <a:rPr lang="en-US" smtClean="0"/>
-              <a:t>8/20/2025</a:t>
+              <a:t>4/16/2026</a:t>
             </a:fld>
             <a:endParaRPr lang="en-US"/>
           </a:p>
@@ -2964,7 +2964,7 @@
           <a:p>
             <a:fld id="{A76E1671-358D-4BAB-9EB2-DC8D65251B89}" type="datetimeFigureOut">
               <a:rPr lang="en-US" smtClean="0"/>
-              <a:t>8/20/2025</a:t>
+              <a:t>4/16/2026</a:t>
             </a:fld>
             <a:endParaRPr lang="en-US"/>
           </a:p>
@@ -3525,7 +3525,7 @@
         <p:spPr>
           <a:xfrm>
             <a:off x="260350" y="769937"/>
-            <a:ext cx="11064875" cy="6064250"/>
+            <a:ext cx="11931650" cy="6064250"/>
           </a:xfrm>
         </p:spPr>
         <p:txBody>
@@ -3605,20 +3605,44 @@
             </a:pPr>
             <a:r>
               <a:rPr lang="ru-RU" b="1" dirty="0"/>
-              <a:t>Обнаружение аномалий на основе реконструкции формы (закономерностей, поведения)</a:t>
+              <a:t>Обнаружение аномалий на основе </a:t>
+            </a:r>
+            <a:r>
+              <a:rPr lang="ru-RU" b="1" dirty="0" smtClean="0"/>
+              <a:t>суррогатных задач </a:t>
+            </a:r>
+            <a:r>
+              <a:rPr lang="ru-RU" b="1" dirty="0" smtClean="0"/>
+              <a:t>(закономерностей </a:t>
+            </a:r>
+            <a:r>
+              <a:rPr lang="ru-RU" b="1" dirty="0"/>
+              <a:t>поведения)</a:t>
             </a:r>
             <a:r>
               <a:rPr lang="ru-RU" dirty="0"/>
-              <a:t>  временного ряда. (например сжатие - восстановление). При этом можно анализировать ошибку восстановления или сжатое пространство. Но саму задачу предсказания мы не решаем (модели не строим</a:t>
+              <a:t>  временного </a:t>
             </a:r>
             <a:r>
               <a:rPr lang="ru-RU" dirty="0" smtClean="0"/>
-              <a:t>)</a:t>
-            </a:r>
-            <a:endParaRPr lang="ru-RU" dirty="0"/>
-          </a:p>
-          <a:p>
-            <a:pPr marL="800100" lvl="1" indent="-342900">
+              <a:t>ряда </a:t>
+            </a:r>
+            <a:r>
+              <a:rPr lang="ru-RU" dirty="0"/>
+              <a:t>(например сжатие </a:t>
+            </a:r>
+            <a:r>
+              <a:rPr lang="ru-RU" dirty="0" smtClean="0"/>
+              <a:t>– восстановление, остатки предсказание). </a:t>
+            </a:r>
+            <a:r>
+              <a:rPr lang="ru-RU" dirty="0"/>
+              <a:t>При этом можно анализировать ошибку восстановления или сжатое пространство. </a:t>
+            </a:r>
+            <a:endParaRPr lang="ru-RU" dirty="0" smtClean="0"/>
+          </a:p>
+          <a:p>
+            <a:pPr>
               <a:lnSpc>
                 <a:spcPct val="100000"/>
               </a:lnSpc>
@@ -3627,24 +3651,29 @@
               </a:spcBef>
             </a:pPr>
             <a:r>
-              <a:rPr lang="ru-RU" i="1" dirty="0"/>
-              <a:t>Отметим,</a:t>
-            </a:r>
-            <a:r>
-              <a:rPr lang="ru-RU" dirty="0"/>
+              <a:rPr lang="ru-RU" sz="2400" i="1" dirty="0" smtClean="0"/>
+              <a:t>Отметим</a:t>
+            </a:r>
+            <a:r>
+              <a:rPr lang="ru-RU" sz="2400" i="1" dirty="0"/>
+              <a:t>,</a:t>
+            </a:r>
+            <a:r>
+              <a:rPr lang="ru-RU" sz="2400" dirty="0"/>
               <a:t>  что поиск аномалии можно проводить как для полного временного ряда, так и по результатам его </a:t>
             </a:r>
             <a:r>
-              <a:rPr lang="ru-RU" b="1" dirty="0"/>
-              <a:t>преобразования</a:t>
-            </a:r>
-            <a:r>
-              <a:rPr lang="ru-RU" dirty="0"/>
+              <a:rPr lang="ru-RU" sz="2400" b="1" dirty="0" smtClean="0"/>
+              <a:t>преобразования, например редукции к признакам</a:t>
+            </a:r>
+            <a:r>
+              <a:rPr lang="ru-RU" sz="2400" dirty="0" smtClean="0"/>
               <a:t>.</a:t>
             </a:r>
-          </a:p>
-          <a:p>
-            <a:pPr marL="1257300" lvl="2" indent="-342900">
+            <a:endParaRPr lang="ru-RU" sz="2400" dirty="0"/>
+          </a:p>
+          <a:p>
+            <a:pPr marL="342900" indent="-342900">
               <a:lnSpc>
                 <a:spcPct val="100000"/>
               </a:lnSpc>
@@ -3653,7 +3682,7 @@
               </a:spcBef>
             </a:pPr>
             <a:r>
-              <a:rPr lang="ru-RU" sz="2400" dirty="0"/>
+              <a:rPr lang="ru-RU" dirty="0"/>
               <a:t>Пример поиска аномалии в остатках декомпозиции.</a:t>
             </a:r>
           </a:p>
@@ -3944,7 +3973,6 @@
               <a:rPr lang="ru-RU" sz="2200" dirty="0" smtClean="0"/>
               <a:t>:</a:t>
             </a:r>
-            <a:endParaRPr lang="ru-RU" sz="2200" dirty="0" smtClean="0"/>
           </a:p>
           <a:p>
             <a:r>
@@ -8775,8 +8803,8 @@
           </a:p>
         </p:txBody>
       </p:sp>
-      <mc:AlternateContent xmlns:mc="http://schemas.openxmlformats.org/markup-compatibility/2006">
-        <mc:Choice xmlns:a14="http://schemas.microsoft.com/office/drawing/2010/main" Requires="a14">
+      <mc:AlternateContent xmlns:mc="http://schemas.openxmlformats.org/markup-compatibility/2006" xmlns:a14="http://schemas.microsoft.com/office/drawing/2010/main">
+        <mc:Choice Requires="a14">
           <p:sp>
             <p:nvSpPr>
               <p:cNvPr id="3" name="Объект 2"/>
@@ -9507,7 +9535,7 @@
             </p:txBody>
           </p:sp>
         </mc:Choice>
-        <mc:Fallback>
+        <mc:Fallback xmlns="">
           <p:sp>
             <p:nvSpPr>
               <p:cNvPr id="3" name="Объект 2"/>
@@ -15536,6 +15564,13 @@
   <p:clrMapOvr>
     <a:masterClrMapping/>
   </p:clrMapOvr>
+  <p:timing>
+    <p:tnLst>
+      <p:par>
+        <p:cTn id="1" dur="indefinite" restart="never" nodeType="tmRoot"/>
+      </p:par>
+    </p:tnLst>
+  </p:timing>
 </p:sld>
 </file>
 
